--- a/ezr-survey/inst/templates/ezrsurvey-16x9.pptx
+++ b/ezr-survey/inst/templates/ezrsurvey-16x9.pptx
@@ -124,6 +124,35 @@
           <a:chExt cx="0" cy="0"/>
         </a:xfrm>
       </p:grpSpPr>
+      <p:sp xmlns:p="http://schemas.openxmlformats.org/presentationml/2006/main" xmlns:a="http://schemas.openxmlformats.org/drawingml/2006/main">
+        <p:nvSpPr>
+          <p:cNvPr id="890" name="Cover"/>
+          <p:cNvSpPr/>
+          <p:nvPr/>
+        </p:nvSpPr>
+        <p:spPr>
+          <a:xfrm>
+            <a:off x="0" y="0"/>
+            <a:ext cx="12192000" cy="6858000"/>
+          </a:xfrm>
+          <a:prstGeom prst="rect">
+            <a:avLst/>
+          </a:prstGeom>
+          <a:solidFill>
+            <a:srgbClr val="12314E"/>
+          </a:solidFill>
+          <a:ln>
+            <a:noFill/>
+          </a:ln>
+        </p:spPr>
+        <p:txBody>
+          <a:bodyPr/>
+          <a:lstStyle/>
+          <a:p>
+            <a:endParaRPr/>
+          </a:p>
+        </p:txBody>
+      </p:sp>
       <p:sp>
         <p:nvSpPr>
           <p:cNvPr id="2" name="Title 1"/>
@@ -141,8 +170,18 @@
           </a:xfrm>
         </p:spPr>
         <p:txBody>
-          <a:bodyPr/>
-          <a:lstStyle/>
+          <a:bodyPr>
+            <a:normAutofit xmlns:a="http://schemas.openxmlformats.org/drawingml/2006/main"/>
+          </a:bodyPr>
+          <a:lstStyle>
+            <a:lvl1pPr xmlns:a="http://schemas.openxmlformats.org/drawingml/2006/main" algn="l">
+              <a:defRPr xmlns:a="http://schemas.openxmlformats.org/drawingml/2006/main" sz="4000" b="1">
+                <a:solidFill xmlns:a="http://schemas.openxmlformats.org/drawingml/2006/main">
+                  <a:srgbClr val="FFFFFF"/>
+                </a:solidFill>
+              </a:defRPr>
+            </a:lvl1pPr>
+          </a:lstStyle>
           <a:p>
             <a:r>
               <a:rPr lang="en-US" smtClean="0"/>
@@ -164,20 +203,20 @@
         </p:nvSpPr>
         <p:spPr>
           <a:xfrm>
-            <a:off x="1828800" y="3886200"/>
-            <a:ext cx="8534400" cy="1752600"/>
+            <a:off x="914400" y="3886200"/>
+            <a:ext cx="10363200" cy="1752600"/>
           </a:xfrm>
         </p:spPr>
         <p:txBody>
-          <a:bodyPr/>
+          <a:bodyPr>
+            <a:normAutofit xmlns:a="http://schemas.openxmlformats.org/drawingml/2006/main"/>
+          </a:bodyPr>
           <a:lstStyle>
-            <a:lvl1pPr marL="0" indent="0" algn="ctr">
-              <a:buNone/>
-              <a:defRPr>
-                <a:solidFill>
-                  <a:schemeClr val="tx1">
-                    <a:tint val="75000"/>
-                  </a:schemeClr>
+            <a:lvl1pPr marL="0" indent="0" algn="l">
+              <a:buNone/>
+              <a:defRPr sz="1800">
+                <a:solidFill xmlns:a="http://schemas.openxmlformats.org/drawingml/2006/main">
+                  <a:srgbClr val="DCE4EE"/>
                 </a:solidFill>
               </a:defRPr>
             </a:lvl1pPr>
@@ -283,7 +322,9 @@
         </p:nvSpPr>
         <p:spPr/>
         <p:txBody>
-          <a:bodyPr/>
+          <a:bodyPr>
+            <a:normAutofit xmlns:a="http://schemas.openxmlformats.org/drawingml/2006/main"/>
+          </a:bodyPr>
           <a:lstStyle/>
           <a:p>
             <a:fld id="{E6744CE3-0875-4B69-89C0-6F72D8139561}" type="datetimeFigureOut">
@@ -306,7 +347,9 @@
         </p:nvSpPr>
         <p:spPr/>
         <p:txBody>
-          <a:bodyPr/>
+          <a:bodyPr>
+            <a:normAutofit xmlns:a="http://schemas.openxmlformats.org/drawingml/2006/main"/>
+          </a:bodyPr>
           <a:lstStyle/>
           <a:p>
             <a:endParaRPr lang="en-GB"/>
@@ -325,7 +368,9 @@
         </p:nvSpPr>
         <p:spPr/>
         <p:txBody>
-          <a:bodyPr/>
+          <a:bodyPr>
+            <a:normAutofit xmlns:a="http://schemas.openxmlformats.org/drawingml/2006/main"/>
+          </a:bodyPr>
           <a:lstStyle/>
           <a:p>
             <a:fld id="{8DADB20D-508E-4C6D-A9E4-257D5607B0F6}" type="slidenum">
@@ -338,49 +383,20 @@
       </p:sp>
       <p:sp xmlns:p="http://schemas.openxmlformats.org/presentationml/2006/main" xmlns:a="http://schemas.openxmlformats.org/drawingml/2006/main">
         <p:nvSpPr>
-          <p:cNvPr id="903" name="Title Band"/>
+          <p:cNvPr id="891" name="Cover Accent"/>
           <p:cNvSpPr/>
           <p:nvPr/>
         </p:nvSpPr>
         <p:spPr>
           <a:xfrm>
-            <a:off x="0" y="6473952"/>
-            <a:ext cx="12192000" cy="384048"/>
+            <a:off x="914400" y="3655314"/>
+            <a:ext cx="1828800" cy="38100"/>
           </a:xfrm>
           <a:prstGeom prst="rect">
             <a:avLst/>
           </a:prstGeom>
           <a:solidFill>
-            <a:schemeClr val="accent1"/>
-          </a:solidFill>
-          <a:ln>
-            <a:noFill/>
-          </a:ln>
-        </p:spPr>
-        <p:txBody>
-          <a:bodyPr/>
-          <a:lstStyle/>
-          <a:p>
-            <a:endParaRPr/>
-          </a:p>
-        </p:txBody>
-      </p:sp>
-      <p:sp xmlns:p="http://schemas.openxmlformats.org/presentationml/2006/main" xmlns:a="http://schemas.openxmlformats.org/drawingml/2006/main">
-        <p:nvSpPr>
-          <p:cNvPr id="904" name="Title Accent"/>
-          <p:cNvSpPr/>
-          <p:nvPr/>
-        </p:nvSpPr>
-        <p:spPr>
-          <a:xfrm>
-            <a:off x="914400" y="3646170"/>
-            <a:ext cx="1005840" cy="38100"/>
-          </a:xfrm>
-          <a:prstGeom prst="rect">
-            <a:avLst/>
-          </a:prstGeom>
-          <a:solidFill>
-            <a:schemeClr val="accent1"/>
+            <a:srgbClr val="C9A227"/>
           </a:solidFill>
           <a:ln>
             <a:noFill/>
@@ -436,7 +452,9 @@
         </p:nvSpPr>
         <p:spPr/>
         <p:txBody>
-          <a:bodyPr/>
+          <a:bodyPr>
+            <a:normAutofit xmlns:a="http://schemas.openxmlformats.org/drawingml/2006/main"/>
+          </a:bodyPr>
           <a:lstStyle/>
           <a:p>
             <a:r>
@@ -459,7 +477,9 @@
         </p:nvSpPr>
         <p:spPr/>
         <p:txBody>
-          <a:bodyPr/>
+          <a:bodyPr>
+            <a:normAutofit xmlns:a="http://schemas.openxmlformats.org/drawingml/2006/main"/>
+          </a:bodyPr>
           <a:lstStyle/>
           <a:p>
             <a:pPr lvl="0"/>
@@ -511,7 +531,9 @@
         </p:nvSpPr>
         <p:spPr/>
         <p:txBody>
-          <a:bodyPr/>
+          <a:bodyPr>
+            <a:normAutofit xmlns:a="http://schemas.openxmlformats.org/drawingml/2006/main"/>
+          </a:bodyPr>
           <a:lstStyle/>
           <a:p>
             <a:fld id="{E6744CE3-0875-4B69-89C0-6F72D8139561}" type="datetimeFigureOut">
@@ -534,7 +556,9 @@
         </p:nvSpPr>
         <p:spPr/>
         <p:txBody>
-          <a:bodyPr/>
+          <a:bodyPr>
+            <a:normAutofit xmlns:a="http://schemas.openxmlformats.org/drawingml/2006/main"/>
+          </a:bodyPr>
           <a:lstStyle/>
           <a:p>
             <a:endParaRPr lang="en-GB"/>
@@ -553,7 +577,9 @@
         </p:nvSpPr>
         <p:spPr/>
         <p:txBody>
-          <a:bodyPr/>
+          <a:bodyPr>
+            <a:normAutofit xmlns:a="http://schemas.openxmlformats.org/drawingml/2006/main"/>
+          </a:bodyPr>
           <a:lstStyle/>
           <a:p>
             <a:fld id="{8DADB20D-508E-4C6D-A9E4-257D5607B0F6}" type="slidenum">
@@ -566,78 +592,20 @@
       </p:sp>
       <p:sp xmlns:p="http://schemas.openxmlformats.org/presentationml/2006/main" xmlns:a="http://schemas.openxmlformats.org/drawingml/2006/main">
         <p:nvSpPr>
-          <p:cNvPr id="900" name="Title Hairline"/>
+          <p:cNvPr id="900" name="Title Rule"/>
           <p:cNvSpPr/>
           <p:nvPr/>
         </p:nvSpPr>
         <p:spPr>
           <a:xfrm>
-            <a:off x="609600" y="1463358"/>
-            <a:ext cx="10972800" cy="12700"/>
+            <a:off x="609600" y="1472502"/>
+            <a:ext cx="10972800" cy="25400"/>
           </a:xfrm>
           <a:prstGeom prst="rect">
             <a:avLst/>
           </a:prstGeom>
           <a:solidFill>
-            <a:srgbClr val="D6D6D6"/>
-          </a:solidFill>
-          <a:ln>
-            <a:noFill/>
-          </a:ln>
-        </p:spPr>
-        <p:txBody>
-          <a:bodyPr/>
-          <a:lstStyle/>
-          <a:p>
-            <a:endParaRPr/>
-          </a:p>
-        </p:txBody>
-      </p:sp>
-      <p:sp xmlns:p="http://schemas.openxmlformats.org/presentationml/2006/main" xmlns:a="http://schemas.openxmlformats.org/drawingml/2006/main">
-        <p:nvSpPr>
-          <p:cNvPr id="901" name="Title Accent"/>
-          <p:cNvSpPr/>
-          <p:nvPr/>
-        </p:nvSpPr>
-        <p:spPr>
-          <a:xfrm>
-            <a:off x="609600" y="1450658"/>
-            <a:ext cx="1005840" cy="38100"/>
-          </a:xfrm>
-          <a:prstGeom prst="rect">
-            <a:avLst/>
-          </a:prstGeom>
-          <a:solidFill>
-            <a:schemeClr val="accent1"/>
-          </a:solidFill>
-          <a:ln>
-            <a:noFill/>
-          </a:ln>
-        </p:spPr>
-        <p:txBody>
-          <a:bodyPr/>
-          <a:lstStyle/>
-          <a:p>
-            <a:endParaRPr/>
-          </a:p>
-        </p:txBody>
-      </p:sp>
-      <p:sp xmlns:p="http://schemas.openxmlformats.org/presentationml/2006/main" xmlns:a="http://schemas.openxmlformats.org/drawingml/2006/main">
-        <p:nvSpPr>
-          <p:cNvPr id="902" name="Footer Hairline"/>
-          <p:cNvSpPr/>
-          <p:nvPr/>
-        </p:nvSpPr>
-        <p:spPr>
-          <a:xfrm>
-            <a:off x="609600" y="6309360"/>
-            <a:ext cx="10972800" cy="12700"/>
-          </a:xfrm>
-          <a:prstGeom prst="rect">
-            <a:avLst/>
-          </a:prstGeom>
-          <a:solidFill>
-            <a:srgbClr val="D6D6D6"/>
+            <a:srgbClr val="12314E"/>
           </a:solidFill>
           <a:ln>
             <a:noFill/>
@@ -681,6 +649,35 @@
           <a:chExt cx="0" cy="0"/>
         </a:xfrm>
       </p:grpSpPr>
+      <p:sp xmlns:p="http://schemas.openxmlformats.org/presentationml/2006/main" xmlns:a="http://schemas.openxmlformats.org/drawingml/2006/main">
+        <p:nvSpPr>
+          <p:cNvPr id="892" name="Divider"/>
+          <p:cNvSpPr/>
+          <p:nvPr/>
+        </p:nvSpPr>
+        <p:spPr>
+          <a:xfrm>
+            <a:off x="0" y="0"/>
+            <a:ext cx="12192000" cy="6858000"/>
+          </a:xfrm>
+          <a:prstGeom prst="rect">
+            <a:avLst/>
+          </a:prstGeom>
+          <a:solidFill>
+            <a:srgbClr val="12314E"/>
+          </a:solidFill>
+          <a:ln>
+            <a:noFill/>
+          </a:ln>
+        </p:spPr>
+        <p:txBody>
+          <a:bodyPr/>
+          <a:lstStyle/>
+          <a:p>
+            <a:endParaRPr/>
+          </a:p>
+        </p:txBody>
+      </p:sp>
       <p:sp>
         <p:nvSpPr>
           <p:cNvPr id="2" name="Title 1"/>
@@ -698,10 +695,16 @@
           </a:xfrm>
         </p:spPr>
         <p:txBody>
-          <a:bodyPr anchor="t"/>
+          <a:bodyPr anchor="t">
+            <a:normAutofit xmlns:a="http://schemas.openxmlformats.org/drawingml/2006/main"/>
+          </a:bodyPr>
           <a:lstStyle>
             <a:lvl1pPr algn="l">
-              <a:defRPr sz="4000" b="1" cap="all"/>
+              <a:defRPr sz="4000" b="1" cap="all">
+                <a:solidFill xmlns:a="http://schemas.openxmlformats.org/drawingml/2006/main">
+                  <a:srgbClr val="FFFFFF"/>
+                </a:solidFill>
+              </a:defRPr>
             </a:lvl1pPr>
           </a:lstStyle>
           <a:p>
@@ -730,7 +733,9 @@
           </a:xfrm>
         </p:spPr>
         <p:txBody>
-          <a:bodyPr anchor="b"/>
+          <a:bodyPr anchor="b">
+            <a:normAutofit xmlns:a="http://schemas.openxmlformats.org/drawingml/2006/main"/>
+          </a:bodyPr>
           <a:lstStyle>
             <a:lvl1pPr marL="0" indent="0">
               <a:buNone/>
@@ -844,7 +849,9 @@
         </p:nvSpPr>
         <p:spPr/>
         <p:txBody>
-          <a:bodyPr/>
+          <a:bodyPr>
+            <a:normAutofit xmlns:a="http://schemas.openxmlformats.org/drawingml/2006/main"/>
+          </a:bodyPr>
           <a:lstStyle/>
           <a:p>
             <a:fld id="{E6744CE3-0875-4B69-89C0-6F72D8139561}" type="datetimeFigureOut">
@@ -867,7 +874,9 @@
         </p:nvSpPr>
         <p:spPr/>
         <p:txBody>
-          <a:bodyPr/>
+          <a:bodyPr>
+            <a:normAutofit xmlns:a="http://schemas.openxmlformats.org/drawingml/2006/main"/>
+          </a:bodyPr>
           <a:lstStyle/>
           <a:p>
             <a:endParaRPr lang="en-GB"/>
@@ -886,7 +895,9 @@
         </p:nvSpPr>
         <p:spPr/>
         <p:txBody>
-          <a:bodyPr/>
+          <a:bodyPr>
+            <a:normAutofit xmlns:a="http://schemas.openxmlformats.org/drawingml/2006/main"/>
+          </a:bodyPr>
           <a:lstStyle/>
           <a:p>
             <a:fld id="{8DADB20D-508E-4C6D-A9E4-257D5607B0F6}" type="slidenum">
@@ -899,78 +910,20 @@
       </p:sp>
       <p:sp xmlns:p="http://schemas.openxmlformats.org/presentationml/2006/main" xmlns:a="http://schemas.openxmlformats.org/drawingml/2006/main">
         <p:nvSpPr>
-          <p:cNvPr id="900" name="Title Hairline"/>
+          <p:cNvPr id="893" name="Divider Accent"/>
           <p:cNvSpPr/>
           <p:nvPr/>
         </p:nvSpPr>
         <p:spPr>
           <a:xfrm>
-            <a:off x="963084" y="5814695"/>
-            <a:ext cx="10363200" cy="12700"/>
+            <a:off x="963084" y="4313936"/>
+            <a:ext cx="1828800" cy="38100"/>
           </a:xfrm>
           <a:prstGeom prst="rect">
             <a:avLst/>
           </a:prstGeom>
           <a:solidFill>
-            <a:srgbClr val="D6D6D6"/>
-          </a:solidFill>
-          <a:ln>
-            <a:noFill/>
-          </a:ln>
-        </p:spPr>
-        <p:txBody>
-          <a:bodyPr/>
-          <a:lstStyle/>
-          <a:p>
-            <a:endParaRPr/>
-          </a:p>
-        </p:txBody>
-      </p:sp>
-      <p:sp xmlns:p="http://schemas.openxmlformats.org/presentationml/2006/main" xmlns:a="http://schemas.openxmlformats.org/drawingml/2006/main">
-        <p:nvSpPr>
-          <p:cNvPr id="901" name="Title Accent"/>
-          <p:cNvSpPr/>
-          <p:nvPr/>
-        </p:nvSpPr>
-        <p:spPr>
-          <a:xfrm>
-            <a:off x="963084" y="5801995"/>
-            <a:ext cx="1005840" cy="38100"/>
-          </a:xfrm>
-          <a:prstGeom prst="rect">
-            <a:avLst/>
-          </a:prstGeom>
-          <a:solidFill>
-            <a:schemeClr val="accent1"/>
-          </a:solidFill>
-          <a:ln>
-            <a:noFill/>
-          </a:ln>
-        </p:spPr>
-        <p:txBody>
-          <a:bodyPr/>
-          <a:lstStyle/>
-          <a:p>
-            <a:endParaRPr/>
-          </a:p>
-        </p:txBody>
-      </p:sp>
-      <p:sp xmlns:p="http://schemas.openxmlformats.org/presentationml/2006/main" xmlns:a="http://schemas.openxmlformats.org/drawingml/2006/main">
-        <p:nvSpPr>
-          <p:cNvPr id="902" name="Footer Hairline"/>
-          <p:cNvSpPr/>
-          <p:nvPr/>
-        </p:nvSpPr>
-        <p:spPr>
-          <a:xfrm>
-            <a:off x="963084" y="6309360"/>
-            <a:ext cx="10363200" cy="12700"/>
-          </a:xfrm>
-          <a:prstGeom prst="rect">
-            <a:avLst/>
-          </a:prstGeom>
-          <a:solidFill>
-            <a:srgbClr val="D6D6D6"/>
+            <a:srgbClr val="C9A227"/>
           </a:solidFill>
           <a:ln>
             <a:noFill/>
@@ -1026,7 +979,9 @@
         </p:nvSpPr>
         <p:spPr/>
         <p:txBody>
-          <a:bodyPr/>
+          <a:bodyPr>
+            <a:normAutofit xmlns:a="http://schemas.openxmlformats.org/drawingml/2006/main"/>
+          </a:bodyPr>
           <a:lstStyle/>
           <a:p>
             <a:r>
@@ -1054,7 +1009,9 @@
           </a:xfrm>
         </p:spPr>
         <p:txBody>
-          <a:bodyPr/>
+          <a:bodyPr>
+            <a:normAutofit xmlns:a="http://schemas.openxmlformats.org/drawingml/2006/main"/>
+          </a:bodyPr>
           <a:lstStyle>
             <a:lvl1pPr>
               <a:defRPr sz="2800"/>
@@ -1139,7 +1096,9 @@
           </a:xfrm>
         </p:spPr>
         <p:txBody>
-          <a:bodyPr/>
+          <a:bodyPr>
+            <a:normAutofit xmlns:a="http://schemas.openxmlformats.org/drawingml/2006/main"/>
+          </a:bodyPr>
           <a:lstStyle>
             <a:lvl1pPr>
               <a:defRPr sz="2800"/>
@@ -1219,7 +1178,9 @@
         </p:nvSpPr>
         <p:spPr/>
         <p:txBody>
-          <a:bodyPr/>
+          <a:bodyPr>
+            <a:normAutofit xmlns:a="http://schemas.openxmlformats.org/drawingml/2006/main"/>
+          </a:bodyPr>
           <a:lstStyle/>
           <a:p>
             <a:fld id="{E6744CE3-0875-4B69-89C0-6F72D8139561}" type="datetimeFigureOut">
@@ -1242,7 +1203,9 @@
         </p:nvSpPr>
         <p:spPr/>
         <p:txBody>
-          <a:bodyPr/>
+          <a:bodyPr>
+            <a:normAutofit xmlns:a="http://schemas.openxmlformats.org/drawingml/2006/main"/>
+          </a:bodyPr>
           <a:lstStyle/>
           <a:p>
             <a:endParaRPr lang="en-GB"/>
@@ -1261,7 +1224,9 @@
         </p:nvSpPr>
         <p:spPr/>
         <p:txBody>
-          <a:bodyPr/>
+          <a:bodyPr>
+            <a:normAutofit xmlns:a="http://schemas.openxmlformats.org/drawingml/2006/main"/>
+          </a:bodyPr>
           <a:lstStyle/>
           <a:p>
             <a:fld id="{8DADB20D-508E-4C6D-A9E4-257D5607B0F6}" type="slidenum">
@@ -1274,78 +1239,20 @@
       </p:sp>
       <p:sp xmlns:p="http://schemas.openxmlformats.org/presentationml/2006/main" xmlns:a="http://schemas.openxmlformats.org/drawingml/2006/main">
         <p:nvSpPr>
-          <p:cNvPr id="900" name="Title Hairline"/>
+          <p:cNvPr id="900" name="Title Rule"/>
           <p:cNvSpPr/>
           <p:nvPr/>
         </p:nvSpPr>
         <p:spPr>
           <a:xfrm>
-            <a:off x="609600" y="1463358"/>
-            <a:ext cx="10972800" cy="12700"/>
+            <a:off x="609600" y="1472502"/>
+            <a:ext cx="10972800" cy="25400"/>
           </a:xfrm>
           <a:prstGeom prst="rect">
             <a:avLst/>
           </a:prstGeom>
           <a:solidFill>
-            <a:srgbClr val="D6D6D6"/>
-          </a:solidFill>
-          <a:ln>
-            <a:noFill/>
-          </a:ln>
-        </p:spPr>
-        <p:txBody>
-          <a:bodyPr/>
-          <a:lstStyle/>
-          <a:p>
-            <a:endParaRPr/>
-          </a:p>
-        </p:txBody>
-      </p:sp>
-      <p:sp xmlns:p="http://schemas.openxmlformats.org/presentationml/2006/main" xmlns:a="http://schemas.openxmlformats.org/drawingml/2006/main">
-        <p:nvSpPr>
-          <p:cNvPr id="901" name="Title Accent"/>
-          <p:cNvSpPr/>
-          <p:nvPr/>
-        </p:nvSpPr>
-        <p:spPr>
-          <a:xfrm>
-            <a:off x="609600" y="1450658"/>
-            <a:ext cx="1005840" cy="38100"/>
-          </a:xfrm>
-          <a:prstGeom prst="rect">
-            <a:avLst/>
-          </a:prstGeom>
-          <a:solidFill>
-            <a:schemeClr val="accent1"/>
-          </a:solidFill>
-          <a:ln>
-            <a:noFill/>
-          </a:ln>
-        </p:spPr>
-        <p:txBody>
-          <a:bodyPr/>
-          <a:lstStyle/>
-          <a:p>
-            <a:endParaRPr/>
-          </a:p>
-        </p:txBody>
-      </p:sp>
-      <p:sp xmlns:p="http://schemas.openxmlformats.org/presentationml/2006/main" xmlns:a="http://schemas.openxmlformats.org/drawingml/2006/main">
-        <p:nvSpPr>
-          <p:cNvPr id="902" name="Footer Hairline"/>
-          <p:cNvSpPr/>
-          <p:nvPr/>
-        </p:nvSpPr>
-        <p:spPr>
-          <a:xfrm>
-            <a:off x="609600" y="6309360"/>
-            <a:ext cx="10972800" cy="12700"/>
-          </a:xfrm>
-          <a:prstGeom prst="rect">
-            <a:avLst/>
-          </a:prstGeom>
-          <a:solidFill>
-            <a:srgbClr val="D6D6D6"/>
+            <a:srgbClr val="12314E"/>
           </a:solidFill>
           <a:ln>
             <a:noFill/>
@@ -1401,7 +1308,9 @@
         </p:nvSpPr>
         <p:spPr/>
         <p:txBody>
-          <a:bodyPr/>
+          <a:bodyPr>
+            <a:normAutofit xmlns:a="http://schemas.openxmlformats.org/drawingml/2006/main"/>
+          </a:bodyPr>
           <a:lstStyle>
             <a:lvl1pPr>
               <a:defRPr/>
@@ -1433,7 +1342,9 @@
           </a:xfrm>
         </p:spPr>
         <p:txBody>
-          <a:bodyPr anchor="b"/>
+          <a:bodyPr anchor="b">
+            <a:normAutofit xmlns:a="http://schemas.openxmlformats.org/drawingml/2006/main"/>
+          </a:bodyPr>
           <a:lstStyle>
             <a:lvl1pPr marL="0" indent="0">
               <a:buNone/>
@@ -1498,7 +1409,9 @@
           </a:xfrm>
         </p:spPr>
         <p:txBody>
-          <a:bodyPr/>
+          <a:bodyPr>
+            <a:normAutofit xmlns:a="http://schemas.openxmlformats.org/drawingml/2006/main"/>
+          </a:bodyPr>
           <a:lstStyle>
             <a:lvl1pPr>
               <a:defRPr sz="2400"/>
@@ -1583,7 +1496,9 @@
           </a:xfrm>
         </p:spPr>
         <p:txBody>
-          <a:bodyPr anchor="b"/>
+          <a:bodyPr anchor="b">
+            <a:normAutofit xmlns:a="http://schemas.openxmlformats.org/drawingml/2006/main"/>
+          </a:bodyPr>
           <a:lstStyle>
             <a:lvl1pPr marL="0" indent="0">
               <a:buNone/>
@@ -1648,7 +1563,9 @@
           </a:xfrm>
         </p:spPr>
         <p:txBody>
-          <a:bodyPr/>
+          <a:bodyPr>
+            <a:normAutofit xmlns:a="http://schemas.openxmlformats.org/drawingml/2006/main"/>
+          </a:bodyPr>
           <a:lstStyle>
             <a:lvl1pPr>
               <a:defRPr sz="2400"/>
@@ -1728,7 +1645,9 @@
         </p:nvSpPr>
         <p:spPr/>
         <p:txBody>
-          <a:bodyPr/>
+          <a:bodyPr>
+            <a:normAutofit xmlns:a="http://schemas.openxmlformats.org/drawingml/2006/main"/>
+          </a:bodyPr>
           <a:lstStyle/>
           <a:p>
             <a:fld id="{E6744CE3-0875-4B69-89C0-6F72D8139561}" type="datetimeFigureOut">
@@ -1751,7 +1670,9 @@
         </p:nvSpPr>
         <p:spPr/>
         <p:txBody>
-          <a:bodyPr/>
+          <a:bodyPr>
+            <a:normAutofit xmlns:a="http://schemas.openxmlformats.org/drawingml/2006/main"/>
+          </a:bodyPr>
           <a:lstStyle/>
           <a:p>
             <a:endParaRPr lang="en-GB"/>
@@ -1770,7 +1691,9 @@
         </p:nvSpPr>
         <p:spPr/>
         <p:txBody>
-          <a:bodyPr/>
+          <a:bodyPr>
+            <a:normAutofit xmlns:a="http://schemas.openxmlformats.org/drawingml/2006/main"/>
+          </a:bodyPr>
           <a:lstStyle/>
           <a:p>
             <a:fld id="{8DADB20D-508E-4C6D-A9E4-257D5607B0F6}" type="slidenum">
@@ -1783,78 +1706,20 @@
       </p:sp>
       <p:sp xmlns:p="http://schemas.openxmlformats.org/presentationml/2006/main" xmlns:a="http://schemas.openxmlformats.org/drawingml/2006/main">
         <p:nvSpPr>
-          <p:cNvPr id="900" name="Title Hairline"/>
+          <p:cNvPr id="900" name="Title Rule"/>
           <p:cNvSpPr/>
           <p:nvPr/>
         </p:nvSpPr>
         <p:spPr>
           <a:xfrm>
-            <a:off x="609600" y="1463358"/>
-            <a:ext cx="10972800" cy="12700"/>
+            <a:off x="609600" y="1472502"/>
+            <a:ext cx="10972800" cy="25400"/>
           </a:xfrm>
           <a:prstGeom prst="rect">
             <a:avLst/>
           </a:prstGeom>
           <a:solidFill>
-            <a:srgbClr val="D6D6D6"/>
-          </a:solidFill>
-          <a:ln>
-            <a:noFill/>
-          </a:ln>
-        </p:spPr>
-        <p:txBody>
-          <a:bodyPr/>
-          <a:lstStyle/>
-          <a:p>
-            <a:endParaRPr/>
-          </a:p>
-        </p:txBody>
-      </p:sp>
-      <p:sp xmlns:p="http://schemas.openxmlformats.org/presentationml/2006/main" xmlns:a="http://schemas.openxmlformats.org/drawingml/2006/main">
-        <p:nvSpPr>
-          <p:cNvPr id="901" name="Title Accent"/>
-          <p:cNvSpPr/>
-          <p:nvPr/>
-        </p:nvSpPr>
-        <p:spPr>
-          <a:xfrm>
-            <a:off x="609600" y="1450658"/>
-            <a:ext cx="1005840" cy="38100"/>
-          </a:xfrm>
-          <a:prstGeom prst="rect">
-            <a:avLst/>
-          </a:prstGeom>
-          <a:solidFill>
-            <a:schemeClr val="accent1"/>
-          </a:solidFill>
-          <a:ln>
-            <a:noFill/>
-          </a:ln>
-        </p:spPr>
-        <p:txBody>
-          <a:bodyPr/>
-          <a:lstStyle/>
-          <a:p>
-            <a:endParaRPr/>
-          </a:p>
-        </p:txBody>
-      </p:sp>
-      <p:sp xmlns:p="http://schemas.openxmlformats.org/presentationml/2006/main" xmlns:a="http://schemas.openxmlformats.org/drawingml/2006/main">
-        <p:nvSpPr>
-          <p:cNvPr id="902" name="Footer Hairline"/>
-          <p:cNvSpPr/>
-          <p:nvPr/>
-        </p:nvSpPr>
-        <p:spPr>
-          <a:xfrm>
-            <a:off x="609600" y="6309360"/>
-            <a:ext cx="10972800" cy="12700"/>
-          </a:xfrm>
-          <a:prstGeom prst="rect">
-            <a:avLst/>
-          </a:prstGeom>
-          <a:solidFill>
-            <a:srgbClr val="D6D6D6"/>
+            <a:srgbClr val="12314E"/>
           </a:solidFill>
           <a:ln>
             <a:noFill/>
@@ -1910,7 +1775,9 @@
         </p:nvSpPr>
         <p:spPr/>
         <p:txBody>
-          <a:bodyPr/>
+          <a:bodyPr>
+            <a:normAutofit xmlns:a="http://schemas.openxmlformats.org/drawingml/2006/main"/>
+          </a:bodyPr>
           <a:lstStyle/>
           <a:p>
             <a:r>
@@ -1933,7 +1800,9 @@
         </p:nvSpPr>
         <p:spPr/>
         <p:txBody>
-          <a:bodyPr/>
+          <a:bodyPr>
+            <a:normAutofit xmlns:a="http://schemas.openxmlformats.org/drawingml/2006/main"/>
+          </a:bodyPr>
           <a:lstStyle/>
           <a:p>
             <a:fld id="{E6744CE3-0875-4B69-89C0-6F72D8139561}" type="datetimeFigureOut">
@@ -1956,7 +1825,9 @@
         </p:nvSpPr>
         <p:spPr/>
         <p:txBody>
-          <a:bodyPr/>
+          <a:bodyPr>
+            <a:normAutofit xmlns:a="http://schemas.openxmlformats.org/drawingml/2006/main"/>
+          </a:bodyPr>
           <a:lstStyle/>
           <a:p>
             <a:endParaRPr lang="en-GB"/>
@@ -1975,7 +1846,9 @@
         </p:nvSpPr>
         <p:spPr/>
         <p:txBody>
-          <a:bodyPr/>
+          <a:bodyPr>
+            <a:normAutofit xmlns:a="http://schemas.openxmlformats.org/drawingml/2006/main"/>
+          </a:bodyPr>
           <a:lstStyle/>
           <a:p>
             <a:fld id="{8DADB20D-508E-4C6D-A9E4-257D5607B0F6}" type="slidenum">
@@ -1988,78 +1861,20 @@
       </p:sp>
       <p:sp xmlns:p="http://schemas.openxmlformats.org/presentationml/2006/main" xmlns:a="http://schemas.openxmlformats.org/drawingml/2006/main">
         <p:nvSpPr>
-          <p:cNvPr id="900" name="Title Hairline"/>
+          <p:cNvPr id="900" name="Title Rule"/>
           <p:cNvSpPr/>
           <p:nvPr/>
         </p:nvSpPr>
         <p:spPr>
           <a:xfrm>
-            <a:off x="609600" y="1463358"/>
-            <a:ext cx="10972800" cy="12700"/>
+            <a:off x="609600" y="1472502"/>
+            <a:ext cx="10972800" cy="25400"/>
           </a:xfrm>
           <a:prstGeom prst="rect">
             <a:avLst/>
           </a:prstGeom>
           <a:solidFill>
-            <a:srgbClr val="D6D6D6"/>
-          </a:solidFill>
-          <a:ln>
-            <a:noFill/>
-          </a:ln>
-        </p:spPr>
-        <p:txBody>
-          <a:bodyPr/>
-          <a:lstStyle/>
-          <a:p>
-            <a:endParaRPr/>
-          </a:p>
-        </p:txBody>
-      </p:sp>
-      <p:sp xmlns:p="http://schemas.openxmlformats.org/presentationml/2006/main" xmlns:a="http://schemas.openxmlformats.org/drawingml/2006/main">
-        <p:nvSpPr>
-          <p:cNvPr id="901" name="Title Accent"/>
-          <p:cNvSpPr/>
-          <p:nvPr/>
-        </p:nvSpPr>
-        <p:spPr>
-          <a:xfrm>
-            <a:off x="609600" y="1450658"/>
-            <a:ext cx="1005840" cy="38100"/>
-          </a:xfrm>
-          <a:prstGeom prst="rect">
-            <a:avLst/>
-          </a:prstGeom>
-          <a:solidFill>
-            <a:schemeClr val="accent1"/>
-          </a:solidFill>
-          <a:ln>
-            <a:noFill/>
-          </a:ln>
-        </p:spPr>
-        <p:txBody>
-          <a:bodyPr/>
-          <a:lstStyle/>
-          <a:p>
-            <a:endParaRPr/>
-          </a:p>
-        </p:txBody>
-      </p:sp>
-      <p:sp xmlns:p="http://schemas.openxmlformats.org/presentationml/2006/main" xmlns:a="http://schemas.openxmlformats.org/drawingml/2006/main">
-        <p:nvSpPr>
-          <p:cNvPr id="902" name="Footer Hairline"/>
-          <p:cNvSpPr/>
-          <p:nvPr/>
-        </p:nvSpPr>
-        <p:spPr>
-          <a:xfrm>
-            <a:off x="609600" y="6309360"/>
-            <a:ext cx="10972800" cy="12700"/>
-          </a:xfrm>
-          <a:prstGeom prst="rect">
-            <a:avLst/>
-          </a:prstGeom>
-          <a:solidFill>
-            <a:srgbClr val="D6D6D6"/>
+            <a:srgbClr val="12314E"/>
           </a:solidFill>
           <a:ln>
             <a:noFill/>
@@ -2115,7 +1930,9 @@
         </p:nvSpPr>
         <p:spPr/>
         <p:txBody>
-          <a:bodyPr/>
+          <a:bodyPr>
+            <a:normAutofit xmlns:a="http://schemas.openxmlformats.org/drawingml/2006/main"/>
+          </a:bodyPr>
           <a:lstStyle/>
           <a:p>
             <a:fld id="{E6744CE3-0875-4B69-89C0-6F72D8139561}" type="datetimeFigureOut">
@@ -2138,7 +1955,9 @@
         </p:nvSpPr>
         <p:spPr/>
         <p:txBody>
-          <a:bodyPr/>
+          <a:bodyPr>
+            <a:normAutofit xmlns:a="http://schemas.openxmlformats.org/drawingml/2006/main"/>
+          </a:bodyPr>
           <a:lstStyle/>
           <a:p>
             <a:endParaRPr lang="en-GB"/>
@@ -2157,7 +1976,9 @@
         </p:nvSpPr>
         <p:spPr/>
         <p:txBody>
-          <a:bodyPr/>
+          <a:bodyPr>
+            <a:normAutofit xmlns:a="http://schemas.openxmlformats.org/drawingml/2006/main"/>
+          </a:bodyPr>
           <a:lstStyle/>
           <a:p>
             <a:fld id="{8DADB20D-508E-4C6D-A9E4-257D5607B0F6}" type="slidenum">
@@ -2210,7 +2031,9 @@
         </p:nvSpPr>
         <p:spPr/>
         <p:txBody>
-          <a:bodyPr/>
+          <a:bodyPr>
+            <a:normAutofit xmlns:a="http://schemas.openxmlformats.org/drawingml/2006/main"/>
+          </a:bodyPr>
           <a:lstStyle/>
           <a:p>
             <a:r>
@@ -2238,7 +2061,9 @@
           </a:xfrm>
         </p:spPr>
         <p:txBody>
-          <a:bodyPr/>
+          <a:bodyPr>
+            <a:normAutofit xmlns:a="http://schemas.openxmlformats.org/drawingml/2006/main"/>
+          </a:bodyPr>
           <a:lstStyle>
             <a:lvl1pPr>
               <a:defRPr sz="2800"/>
@@ -2323,7 +2148,9 @@
           </a:xfrm>
         </p:spPr>
         <p:txBody>
-          <a:bodyPr/>
+          <a:bodyPr>
+            <a:normAutofit xmlns:a="http://schemas.openxmlformats.org/drawingml/2006/main"/>
+          </a:bodyPr>
           <a:lstStyle>
             <a:lvl1pPr>
               <a:defRPr sz="2800"/>
@@ -2403,7 +2230,9 @@
         </p:nvSpPr>
         <p:spPr/>
         <p:txBody>
-          <a:bodyPr/>
+          <a:bodyPr>
+            <a:normAutofit xmlns:a="http://schemas.openxmlformats.org/drawingml/2006/main"/>
+          </a:bodyPr>
           <a:lstStyle/>
           <a:p>
             <a:fld id="{E6744CE3-0875-4B69-89C0-6F72D8139561}" type="datetimeFigureOut">
@@ -2426,7 +2255,9 @@
         </p:nvSpPr>
         <p:spPr/>
         <p:txBody>
-          <a:bodyPr/>
+          <a:bodyPr>
+            <a:normAutofit xmlns:a="http://schemas.openxmlformats.org/drawingml/2006/main"/>
+          </a:bodyPr>
           <a:lstStyle/>
           <a:p>
             <a:endParaRPr lang="en-GB"/>
@@ -2445,7 +2276,9 @@
         </p:nvSpPr>
         <p:spPr/>
         <p:txBody>
-          <a:bodyPr/>
+          <a:bodyPr>
+            <a:normAutofit xmlns:a="http://schemas.openxmlformats.org/drawingml/2006/main"/>
+          </a:bodyPr>
           <a:lstStyle/>
           <a:p>
             <a:fld id="{8DADB20D-508E-4C6D-A9E4-257D5607B0F6}" type="slidenum">
@@ -2458,78 +2291,20 @@
       </p:sp>
       <p:sp xmlns:p="http://schemas.openxmlformats.org/presentationml/2006/main" xmlns:a="http://schemas.openxmlformats.org/drawingml/2006/main">
         <p:nvSpPr>
-          <p:cNvPr id="900" name="Title Hairline"/>
+          <p:cNvPr id="900" name="Title Rule"/>
           <p:cNvSpPr/>
           <p:nvPr/>
         </p:nvSpPr>
         <p:spPr>
           <a:xfrm>
-            <a:off x="609600" y="1463358"/>
-            <a:ext cx="10972800" cy="12700"/>
+            <a:off x="609600" y="1472502"/>
+            <a:ext cx="10972800" cy="25400"/>
           </a:xfrm>
           <a:prstGeom prst="rect">
             <a:avLst/>
           </a:prstGeom>
           <a:solidFill>
-            <a:srgbClr val="D6D6D6"/>
-          </a:solidFill>
-          <a:ln>
-            <a:noFill/>
-          </a:ln>
-        </p:spPr>
-        <p:txBody>
-          <a:bodyPr/>
-          <a:lstStyle/>
-          <a:p>
-            <a:endParaRPr/>
-          </a:p>
-        </p:txBody>
-      </p:sp>
-      <p:sp xmlns:p="http://schemas.openxmlformats.org/presentationml/2006/main" xmlns:a="http://schemas.openxmlformats.org/drawingml/2006/main">
-        <p:nvSpPr>
-          <p:cNvPr id="901" name="Title Accent"/>
-          <p:cNvSpPr/>
-          <p:nvPr/>
-        </p:nvSpPr>
-        <p:spPr>
-          <a:xfrm>
-            <a:off x="609600" y="1450658"/>
-            <a:ext cx="1005840" cy="38100"/>
-          </a:xfrm>
-          <a:prstGeom prst="rect">
-            <a:avLst/>
-          </a:prstGeom>
-          <a:solidFill>
-            <a:schemeClr val="accent1"/>
-          </a:solidFill>
-          <a:ln>
-            <a:noFill/>
-          </a:ln>
-        </p:spPr>
-        <p:txBody>
-          <a:bodyPr/>
-          <a:lstStyle/>
-          <a:p>
-            <a:endParaRPr/>
-          </a:p>
-        </p:txBody>
-      </p:sp>
-      <p:sp xmlns:p="http://schemas.openxmlformats.org/presentationml/2006/main" xmlns:a="http://schemas.openxmlformats.org/drawingml/2006/main">
-        <p:nvSpPr>
-          <p:cNvPr id="902" name="Footer Hairline"/>
-          <p:cNvSpPr/>
-          <p:nvPr/>
-        </p:nvSpPr>
-        <p:spPr>
-          <a:xfrm>
-            <a:off x="609600" y="6309360"/>
-            <a:ext cx="10972800" cy="12700"/>
-          </a:xfrm>
-          <a:prstGeom prst="rect">
-            <a:avLst/>
-          </a:prstGeom>
-          <a:solidFill>
-            <a:srgbClr val="D6D6D6"/>
+            <a:srgbClr val="12314E"/>
           </a:solidFill>
           <a:ln>
             <a:noFill/>
@@ -2599,7 +2374,7 @@
         </p:spPr>
         <p:txBody>
           <a:bodyPr vert="horz" lIns="91440" tIns="45720" rIns="91440" bIns="45720" rtlCol="0" anchor="ctr">
-            <a:normAutofit/>
+            <a:normAutofit xmlns:a="http://schemas.openxmlformats.org/drawingml/2006/main"/>
           </a:bodyPr>
           <a:lstStyle/>
           <a:p>
@@ -2632,7 +2407,7 @@
         </p:spPr>
         <p:txBody>
           <a:bodyPr vert="horz" lIns="91440" tIns="45720" rIns="91440" bIns="45720" rtlCol="0">
-            <a:normAutofit/>
+            <a:normAutofit xmlns:a="http://schemas.openxmlformats.org/drawingml/2006/main"/>
           </a:bodyPr>
           <a:lstStyle/>
           <a:p>
@@ -2693,7 +2468,9 @@
           </a:prstGeom>
         </p:spPr>
         <p:txBody>
-          <a:bodyPr vert="horz" lIns="91440" tIns="45720" rIns="91440" bIns="45720" rtlCol="0" anchor="ctr"/>
+          <a:bodyPr vert="horz" lIns="91440" tIns="45720" rIns="91440" bIns="45720" rtlCol="0" anchor="ctr">
+            <a:normAutofit xmlns:a="http://schemas.openxmlformats.org/drawingml/2006/main"/>
+          </a:bodyPr>
           <a:lstStyle>
             <a:lvl1pPr algn="l">
               <a:defRPr sz="1200">
@@ -2734,7 +2511,9 @@
           </a:prstGeom>
         </p:spPr>
         <p:txBody>
-          <a:bodyPr vert="horz" lIns="91440" tIns="45720" rIns="91440" bIns="45720" rtlCol="0" anchor="ctr"/>
+          <a:bodyPr vert="horz" lIns="91440" tIns="45720" rIns="91440" bIns="45720" rtlCol="0" anchor="ctr">
+            <a:normAutofit xmlns:a="http://schemas.openxmlformats.org/drawingml/2006/main"/>
+          </a:bodyPr>
           <a:lstStyle>
             <a:lvl1pPr algn="ctr">
               <a:defRPr sz="1200">
@@ -2771,7 +2550,9 @@
           </a:prstGeom>
         </p:spPr>
         <p:txBody>
-          <a:bodyPr vert="horz" lIns="91440" tIns="45720" rIns="91440" bIns="45720" rtlCol="0" anchor="ctr"/>
+          <a:bodyPr vert="horz" lIns="91440" tIns="45720" rIns="91440" bIns="45720" rtlCol="0" anchor="ctr">
+            <a:normAutofit xmlns:a="http://schemas.openxmlformats.org/drawingml/2006/main"/>
+          </a:bodyPr>
           <a:lstStyle>
             <a:lvl1pPr algn="r">
               <a:defRPr sz="1200">
@@ -2812,14 +2593,14 @@
   </p:sldLayoutIdLst>
   <p:txStyles>
     <p:titleStyle>
-      <a:lvl1pPr algn="ctr" defTabSz="914400" rtl="0" eaLnBrk="1" latinLnBrk="0" hangingPunct="1">
+      <a:lvl1pPr algn="l" defTabSz="914400" rtl="0" eaLnBrk="1" latinLnBrk="0" hangingPunct="1">
         <a:spcBef>
           <a:spcPct val="0"/>
         </a:spcBef>
         <a:buNone/>
-        <a:defRPr sz="4400" kern="1200">
-          <a:solidFill>
-            <a:schemeClr val="tx1"/>
+        <a:defRPr sz="2400" kern="1200">
+          <a:solidFill xmlns:a="http://schemas.openxmlformats.org/drawingml/2006/main">
+            <a:srgbClr val="12314E"/>
           </a:solidFill>
           <a:latin typeface="+mj-lt"/>
           <a:ea typeface="+mj-ea"/>
@@ -2834,7 +2615,7 @@
         </a:spcBef>
         <a:buFont typeface="Arial" panose="020B0604020202020204" pitchFamily="34" charset="0"/>
         <a:buChar char="•"/>
-        <a:defRPr sz="3200" kern="1200">
+        <a:defRPr sz="1400" kern="1200">
           <a:solidFill>
             <a:schemeClr val="tx1"/>
           </a:solidFill>
@@ -3080,28 +2861,28 @@
         <a:sysClr val="window" lastClr="FFFFFF"/>
       </a:lt1>
       <a:dk2>
-        <a:srgbClr val="1F497D"/>
+        <a:srgbClr val="12314E"/>
       </a:dk2>
       <a:lt2>
-        <a:srgbClr val="EEECE1"/>
+        <a:srgbClr val="EEF1F5"/>
       </a:lt2>
       <a:accent1>
-        <a:srgbClr val="4F81BD"/>
+        <a:srgbClr val="12314E"/>
       </a:accent1>
       <a:accent2>
-        <a:srgbClr val="C0504D"/>
+        <a:srgbClr val="C9A227"/>
       </a:accent2>
       <a:accent3>
-        <a:srgbClr val="9BBB59"/>
+        <a:srgbClr val="3E6E8E"/>
       </a:accent3>
       <a:accent4>
-        <a:srgbClr val="8064A2"/>
+        <a:srgbClr val="6E7C8C"/>
       </a:accent4>
       <a:accent5>
-        <a:srgbClr val="4BACC6"/>
+        <a:srgbClr val="A9B4C0"/>
       </a:accent5>
       <a:accent6>
-        <a:srgbClr val="F79646"/>
+        <a:srgbClr val="D8B04A"/>
       </a:accent6>
       <a:hlink>
         <a:srgbClr val="0000FF"/>
